--- a/system-design-101/vi/lessons/sd-08-014/slides/sd-08-014.pptx
+++ b/system-design-101/vi/lessons/sd-08-014/slides/sd-08-014.pptx
@@ -8464,7 +8464,7 @@
               <a:t> tăng</a:t>
             </a:r>
             <a:r>
-              <a:rPr lang="en-US" sz="2250" dirty="0" spc="2" kern="0">
+              <a:rPr lang="en-US" sz="2250" dirty="0" spc="1" kern="0">
                 <a:solidFill>
                   <a:srgbClr val="E4E1D8"/>
                 </a:solidFill>
@@ -8472,10 +8472,10 @@
                 <a:ea typeface="Be Vietnam Pro" pitchFamily="34" charset="-122"/>
                 <a:cs typeface="Be Vietnam Pro" pitchFamily="34" charset="-120"/>
               </a:rPr>
-              <a:t> dần:</a:t>
-            </a:r>
-            <a:r>
-              <a:rPr lang="en-US" sz="2250" dirty="0" spc="-13" kern="0">
+              <a:t> dần</a:t>
+            </a:r>
+            <a:r>
+              <a:rPr lang="en-US" sz="2250" dirty="0" spc="-1" kern="0">
                 <a:solidFill>
                   <a:srgbClr val="E4E1D8"/>
                 </a:solidFill>
@@ -8483,10 +8483,10 @@
                 <a:ea typeface="Be Vietnam Pro" pitchFamily="34" charset="-122"/>
                 <a:cs typeface="Be Vietnam Pro" pitchFamily="34" charset="-120"/>
               </a:rPr>
-              <a:t> tải</a:t>
-            </a:r>
-            <a:r>
-              <a:rPr lang="en-US" sz="2250" dirty="0" spc="-1" kern="0">
+              <a:t> (giãn</a:t>
+            </a:r>
+            <a:r>
+              <a:rPr lang="en-US" sz="2250" dirty="0" spc="1" kern="0">
                 <a:solidFill>
                   <a:srgbClr val="E4E1D8"/>
                 </a:solidFill>
@@ -8494,10 +8494,10 @@
                 <a:ea typeface="Be Vietnam Pro" pitchFamily="34" charset="-122"/>
                 <a:cs typeface="Be Vietnam Pro" pitchFamily="34" charset="-120"/>
               </a:rPr>
-              <a:t> là</a:t>
-            </a:r>
-            <a:r>
-              <a:rPr lang="en-US" sz="2250" dirty="0" spc="2" kern="0">
+              <a:t> cách chỉ</a:t>
+            </a:r>
+            <a:r>
+              <a:rPr lang="en-US" sz="2250" dirty="0" spc="-3" kern="0">
                 <a:solidFill>
                   <a:srgbClr val="E4E1D8"/>
                 </a:solidFill>
@@ -8505,10 +8505,10 @@
                 <a:ea typeface="Be Vietnam Pro" pitchFamily="34" charset="-122"/>
                 <a:cs typeface="Be Vietnam Pro" pitchFamily="34" charset="-120"/>
               </a:rPr>
-              <a:t> cận</a:t>
-            </a:r>
-            <a:r>
-              <a:rPr lang="en-US" sz="2250" dirty="0" spc="-19" kern="0">
+              <a:t> giảm</a:t>
+            </a:r>
+            <a:r>
+              <a:rPr lang="en-US" sz="2250" dirty="0" spc="-10" kern="0">
                 <a:solidFill>
                   <a:srgbClr val="E4E1D8"/>
                 </a:solidFill>
@@ -8516,7 +8516,62 @@
                 <a:ea typeface="Be Vietnam Pro" pitchFamily="34" charset="-122"/>
                 <a:cs typeface="Be Vietnam Pro" pitchFamily="34" charset="-120"/>
               </a:rPr>
-              <a:t> trên</a:t>
+              <a:t> tốc</a:t>
+            </a:r>
+            <a:r>
+              <a:rPr lang="en-US" sz="2250" dirty="0" spc="19" kern="0">
+                <a:solidFill>
+                  <a:srgbClr val="E4E1D8"/>
+                </a:solidFill>
+                <a:latin typeface="Be Vietnam Pro" pitchFamily="34" charset="0"/>
+                <a:ea typeface="Be Vietnam Pro" pitchFamily="34" charset="-122"/>
+                <a:cs typeface="Be Vietnam Pro" pitchFamily="34" charset="-120"/>
+              </a:rPr>
+              <a:t> độ</a:t>
+            </a:r>
+            <a:r>
+              <a:rPr lang="en-US" sz="2250" dirty="0" spc="-10" kern="0">
+                <a:solidFill>
+                  <a:srgbClr val="E4E1D8"/>
+                </a:solidFill>
+                <a:latin typeface="Be Vietnam Pro" pitchFamily="34" charset="0"/>
+                <a:ea typeface="Be Vietnam Pro" pitchFamily="34" charset="-122"/>
+                <a:cs typeface="Be Vietnam Pro" pitchFamily="34" charset="-120"/>
+              </a:rPr>
+              <a:t> gọi,</a:t>
+            </a:r>
+            <a:r>
+              <a:rPr lang="en-US" sz="2250" dirty="0" spc="1" kern="0">
+                <a:solidFill>
+                  <a:srgbClr val="E4E1D8"/>
+                </a:solidFill>
+                <a:latin typeface="Be Vietnam Pro" pitchFamily="34" charset="0"/>
+                <a:ea typeface="Be Vietnam Pro" pitchFamily="34" charset="-122"/>
+                <a:cs typeface="Be Vietnam Pro" pitchFamily="34" charset="-120"/>
+              </a:rPr>
+              <a:t> không</a:t>
+            </a:r>
+            <a:r>
+              <a:rPr lang="en-US" sz="2250" dirty="0" spc="12" kern="0">
+                <a:solidFill>
+                  <a:srgbClr val="E4E1D8"/>
+                </a:solidFill>
+                <a:latin typeface="Be Vietnam Pro" pitchFamily="34" charset="0"/>
+                <a:ea typeface="Be Vietnam Pro" pitchFamily="34" charset="-122"/>
+                <a:cs typeface="Be Vietnam Pro" pitchFamily="34" charset="-120"/>
+              </a:rPr>
+              <a:t> đổi</a:t>
+            </a:r>
+            <a:r>
+              <a:rPr lang="en-US" sz="2250" dirty="0" spc="-6" kern="0">
+                <a:solidFill>
+                  <a:srgbClr val="E4E1D8"/>
+                </a:solidFill>
+                <a:latin typeface="Be Vietnam Pro" pitchFamily="34" charset="0"/>
+                <a:ea typeface="Be Vietnam Pro" pitchFamily="34" charset="-122"/>
+                <a:cs typeface="Be Vietnam Pro" pitchFamily="34" charset="-120"/>
+              </a:rPr>
+              <a:t> tổng)</a:t>
             </a:r>
             <a:endParaRPr lang="en-US" sz="2250" dirty="0"/>
           </a:p>
